--- a/Quadro_Aulas_Report_2026-06-18.pptx
+++ b/Quadro_Aulas_Report_2026-06-18.pptx
@@ -1038,7 +1038,7 @@
                   <a:srgbClr val="8FA3C0"/>
                 </a:solidFill>
               </a:rPr>
-              <a:t>18 de Junho de 2026 as 08:21</a:t>
+              <a:t>18 de Junho de 2026 as 09:30</a:t>
             </a:r>
             <a:endParaRPr lang="en-US" sz="700" dirty="0"/>
           </a:p>
@@ -1135,7 +1135,7 @@
                   <a:srgbClr val="FFFFFF"/>
                 </a:solidFill>
               </a:rPr>
-              <a:t>393</a:t>
+              <a:t>394</a:t>
             </a:r>
             <a:endParaRPr lang="en-US" sz="2400" dirty="0"/>
           </a:p>
@@ -1207,7 +1207,7 @@
                   <a:srgbClr val="4ADE80"/>
                 </a:solidFill>
               </a:rPr>
-              <a:t>314</a:t>
+              <a:t>315</a:t>
             </a:r>
             <a:endParaRPr lang="en-US" sz="2400" dirty="0"/>
           </a:p>
@@ -1473,7 +1473,7 @@
                   <a:srgbClr val="8FA3C0"/>
                 </a:solidFill>
               </a:rPr>
-              <a:t>80% concluido  .  314 de 393 itens</a:t>
+              <a:t>80% concluido  .  315 de 394 itens</a:t>
             </a:r>
             <a:endParaRPr lang="en-US" sz="700" dirty="0"/>
           </a:p>
@@ -3634,7 +3634,7 @@
                   <a:srgbClr val="222222"/>
                 </a:solidFill>
               </a:rPr>
-              <a:t>1244h</a:t>
+              <a:t>1248h</a:t>
             </a:r>
             <a:endParaRPr lang="en-US" sz="2400" dirty="0"/>
           </a:p>
@@ -3767,7 +3767,7 @@
                   <a:srgbClr val="D97706"/>
                 </a:solidFill>
               </a:rPr>
-              <a:t>1239.9h</a:t>
+              <a:t>1243.9h</a:t>
             </a:r>
             <a:endParaRPr lang="en-US" sz="2400" dirty="0"/>
           </a:p>
@@ -4069,7 +4069,7 @@
                   <a:srgbClr val="888888"/>
                 </a:solidFill>
               </a:rPr>
-              <a:t>projetado: 1386.4h (+11%)</a:t>
+              <a:t>projetado: 1390.4h (+11%)</a:t>
             </a:r>
             <a:endParaRPr lang="en-US" sz="700" dirty="0"/>
           </a:p>
@@ -4084,7 +4084,7 @@
         <p:spPr>
           <a:xfrm>
             <a:off x="2441448" y="2916936"/>
-            <a:ext cx="8627536" cy="54864"/>
+            <a:ext cx="8630469" cy="54864"/>
           </a:xfrm>
           <a:prstGeom prst="rect">
             <a:avLst/>
@@ -4108,8 +4108,8 @@
         </p:nvSpPr>
         <p:spPr>
           <a:xfrm>
-            <a:off x="11068984" y="2916936"/>
-            <a:ext cx="1019384" cy="54864"/>
+            <a:off x="11071917" y="2916936"/>
+            <a:ext cx="1016451" cy="54864"/>
           </a:xfrm>
           <a:prstGeom prst="rect">
             <a:avLst/>
@@ -5300,7 +5300,7 @@
                   <a:srgbClr val="534AB7"/>
                 </a:solidFill>
               </a:rPr>
-              <a:t>11.6%</a:t>
+              <a:t>11.5%</a:t>
             </a:r>
             <a:endParaRPr lang="en-US" sz="2200" dirty="0"/>
           </a:p>
@@ -6440,7 +6440,7 @@
                   <a:srgbClr val="FFFFFF"/>
                 </a:solidFill>
               </a:rPr>
-              <a:t>130</a:t>
+              <a:t>131</a:t>
             </a:r>
             <a:endParaRPr lang="en-US" sz="650" dirty="0"/>
           </a:p>
@@ -6490,7 +6490,7 @@
                   <a:srgbClr val="222222"/>
                 </a:solidFill>
               </a:rPr>
-              <a:t>130 itens criados pos 01/05</a:t>
+              <a:t>131 itens criados pos 01/05</a:t>
             </a:r>
             <a:endParaRPr lang="en-US" sz="750" dirty="0"/>
           </a:p>
@@ -8452,7 +8452,7 @@
         <p:spPr>
           <a:xfrm>
             <a:off x="11009376" y="6153912"/>
-            <a:ext cx="866274" cy="73152"/>
+            <a:ext cx="870883" cy="73152"/>
           </a:xfrm>
           <a:prstGeom prst="rect">
             <a:avLst/>
@@ -8498,7 +8498,7 @@
                   <a:srgbClr val="1D9E75"/>
                 </a:solidFill>
               </a:rPr>
-              <a:t>112.5h · 84 subs finalizadas</a:t>
+              <a:t>116.5h · 85 subs finalizadas</a:t>
             </a:r>
             <a:endParaRPr lang="en-US" sz="950" dirty="0"/>
           </a:p>
@@ -8534,7 +8534,7 @@
                   <a:srgbClr val="888888"/>
                 </a:solidFill>
               </a:rPr>
-              <a:t>133h estimadas</a:t>
+              <a:t>137h estimadas</a:t>
             </a:r>
             <a:endParaRPr lang="en-US" sz="850" dirty="0"/>
           </a:p>

--- a/Quadro_Aulas_Report_2026-06-18.pptx
+++ b/Quadro_Aulas_Report_2026-06-18.pptx
@@ -1038,7 +1038,7 @@
                   <a:srgbClr val="8FA3C0"/>
                 </a:solidFill>
               </a:rPr>
-              <a:t>18 de Junho de 2026 as 09:30</a:t>
+              <a:t>18 de Junho de 2026 as 14:49</a:t>
             </a:r>
             <a:endParaRPr lang="en-US" sz="700" dirty="0"/>
           </a:p>
@@ -1207,7 +1207,7 @@
                   <a:srgbClr val="4ADE80"/>
                 </a:solidFill>
               </a:rPr>
-              <a:t>315</a:t>
+              <a:t>316</a:t>
             </a:r>
             <a:endParaRPr lang="en-US" sz="2400" dirty="0"/>
           </a:p>
@@ -1351,7 +1351,7 @@
                   <a:srgbClr val="F87171"/>
                 </a:solidFill>
               </a:rPr>
-              <a:t>50</a:t>
+              <a:t>49</a:t>
             </a:r>
             <a:endParaRPr lang="en-US" sz="2400" dirty="0"/>
           </a:p>
@@ -1473,7 +1473,7 @@
                   <a:srgbClr val="8FA3C0"/>
                 </a:solidFill>
               </a:rPr>
-              <a:t>80% concluido  .  315 de 394 itens</a:t>
+              <a:t>80% concluido  .  316 de 394 itens</a:t>
             </a:r>
             <a:endParaRPr lang="en-US" sz="700" dirty="0"/>
           </a:p>
@@ -2263,7 +2263,7 @@
                   <a:srgbClr val="222222"/>
                 </a:solidFill>
               </a:rPr>
-              <a:t>A Fazer: 16 . Em progresso: 2 . Finalizados: 95</a:t>
+              <a:t>A Fazer: 16 . Em progresso: 1 . Finalizados: 96</a:t>
             </a:r>
             <a:endParaRPr lang="en-US" sz="750" dirty="0"/>
           </a:p>
@@ -2425,7 +2425,7 @@
         <p:spPr>
           <a:xfrm>
             <a:off x="4946904" y="1033272"/>
-            <a:ext cx="1851111" cy="50292"/>
+            <a:ext cx="1873148" cy="50292"/>
           </a:xfrm>
           <a:prstGeom prst="rect">
             <a:avLst/>
@@ -2471,7 +2471,7 @@
                   <a:srgbClr val="888888"/>
                 </a:solidFill>
               </a:rPr>
-              <a:t>Subs: 84% · 95 de 113</a:t>
+              <a:t>Subs: 85% · 96 de 113</a:t>
             </a:r>
             <a:endParaRPr lang="en-US" sz="650" dirty="0"/>
           </a:p>
@@ -2543,7 +2543,7 @@
                   <a:srgbClr val="534AB7"/>
                 </a:solidFill>
               </a:rPr>
-              <a:t>2 ativo(s) com horas estouradas</a:t>
+              <a:t>1 ativo(s) com horas estouradas</a:t>
             </a:r>
             <a:endParaRPr lang="en-US" sz="750" dirty="0"/>
           </a:p>
@@ -5505,7 +5505,7 @@
                   <a:srgbClr val="888888"/>
                 </a:solidFill>
               </a:rPr>
-              <a:t>fixes sem card no Git · 45% do time com card</a:t>
+              <a:t>fixes sem card no Git · 48% do time com card</a:t>
             </a:r>
             <a:endParaRPr lang="en-US" sz="700" dirty="0"/>
           </a:p>
@@ -5803,7 +5803,7 @@
                   <a:srgbClr val="FFFFFF"/>
                 </a:solidFill>
               </a:rPr>
-              <a:t>2</a:t>
+              <a:t>1</a:t>
             </a:r>
             <a:endParaRPr lang="en-US" sz="650" dirty="0"/>
           </a:p>
@@ -5883,14 +5883,6 @@
             <a:pPr algn="l" indent="0" marL="0">
               <a:buNone/>
             </a:pPr>
-            <a:r>
-              <a:rPr lang="en-US" sz="750" dirty="0">
-                <a:solidFill>
-                  <a:srgbClr val="222222"/>
-                </a:solidFill>
-              </a:rPr>
-              <a:t>#404993 +5h(+125%) [artursilva frwk.com.br]</a:t>
-            </a:r>
             <a:endParaRPr lang="en-US" sz="750" dirty="0"/>
           </a:p>
         </p:txBody>
@@ -7114,7 +7106,7 @@
                   <a:srgbClr val="D85A30"/>
                 </a:solidFill>
               </a:rPr>
-              <a:t>314.5h · 47 subs finalizadas</a:t>
+              <a:t>314.5h · 48 subs finalizadas</a:t>
             </a:r>
             <a:endParaRPr lang="en-US" sz="950" dirty="0"/>
           </a:p>
@@ -7652,7 +7644,7 @@
                   <a:srgbClr val="888888"/>
                 </a:solidFill>
               </a:rPr>
-              <a:t>49h estimadas</a:t>
+              <a:t>53h estimadas</a:t>
             </a:r>
             <a:endParaRPr lang="en-US" sz="850" dirty="0"/>
           </a:p>
@@ -8452,7 +8444,7 @@
         <p:spPr>
           <a:xfrm>
             <a:off x="11009376" y="6153912"/>
-            <a:ext cx="870883" cy="73152"/>
+            <a:ext cx="864572" cy="73152"/>
           </a:xfrm>
           <a:prstGeom prst="rect">
             <a:avLst/>
@@ -8534,7 +8526,7 @@
                   <a:srgbClr val="888888"/>
                 </a:solidFill>
               </a:rPr>
-              <a:t>137h estimadas</a:t>
+              <a:t>138h estimadas</a:t>
             </a:r>
             <a:endParaRPr lang="en-US" sz="850" dirty="0"/>
           </a:p>

--- a/Quadro_Aulas_Report_2026-06-18.pptx
+++ b/Quadro_Aulas_Report_2026-06-18.pptx
@@ -1038,7 +1038,7 @@
                   <a:srgbClr val="8FA3C0"/>
                 </a:solidFill>
               </a:rPr>
-              <a:t>18 de Junho de 2026 as 14:49</a:t>
+              <a:t>18 de Junho de 2026 as 19:43</a:t>
             </a:r>
             <a:endParaRPr lang="en-US" sz="700" dirty="0"/>
           </a:p>
@@ -1135,7 +1135,7 @@
                   <a:srgbClr val="FFFFFF"/>
                 </a:solidFill>
               </a:rPr>
-              <a:t>394</a:t>
+              <a:t>395</a:t>
             </a:r>
             <a:endParaRPr lang="en-US" sz="2400" dirty="0"/>
           </a:p>
@@ -1207,7 +1207,7 @@
                   <a:srgbClr val="4ADE80"/>
                 </a:solidFill>
               </a:rPr>
-              <a:t>316</a:t>
+              <a:t>321</a:t>
             </a:r>
             <a:endParaRPr lang="en-US" sz="2400" dirty="0"/>
           </a:p>
@@ -1279,7 +1279,7 @@
                   <a:srgbClr val="FCD34D"/>
                 </a:solidFill>
               </a:rPr>
-              <a:t>9</a:t>
+              <a:t>8</a:t>
             </a:r>
             <a:endParaRPr lang="en-US" sz="2400" dirty="0"/>
           </a:p>
@@ -1351,7 +1351,7 @@
                   <a:srgbClr val="F87171"/>
                 </a:solidFill>
               </a:rPr>
-              <a:t>49</a:t>
+              <a:t>46</a:t>
             </a:r>
             <a:endParaRPr lang="en-US" sz="2400" dirty="0"/>
           </a:p>
@@ -1427,7 +1427,7 @@
         <p:spPr>
           <a:xfrm>
             <a:off x="137160" y="3538728"/>
-            <a:ext cx="1645920" cy="91440"/>
+            <a:ext cx="1666494" cy="91440"/>
           </a:xfrm>
           <a:prstGeom prst="rect">
             <a:avLst/>
@@ -1473,7 +1473,7 @@
                   <a:srgbClr val="8FA3C0"/>
                 </a:solidFill>
               </a:rPr>
-              <a:t>80% concluido  .  316 de 394 itens</a:t>
+              <a:t>81% concluido  .  321 de 395 itens</a:t>
             </a:r>
             <a:endParaRPr lang="en-US" sz="700" dirty="0"/>
           </a:p>
@@ -2263,7 +2263,7 @@
                   <a:srgbClr val="222222"/>
                 </a:solidFill>
               </a:rPr>
-              <a:t>A Fazer: 16 . Em progresso: 1 . Finalizados: 96</a:t>
+              <a:t>A Fazer: 15 . Em progresso: 1 . Finalizados: 97</a:t>
             </a:r>
             <a:endParaRPr lang="en-US" sz="750" dirty="0"/>
           </a:p>
@@ -2299,7 +2299,7 @@
                   <a:srgbClr val="222222"/>
                 </a:solidFill>
               </a:rPr>
-              <a:t>Est: 428.5h . Real: 521.3h . Rem: 30.5h</a:t>
+              <a:t>Est: 429.5h . Real: 521.8h . Rem: 30.5h</a:t>
             </a:r>
             <a:endParaRPr lang="en-US" sz="750" dirty="0"/>
           </a:p>
@@ -2339,7 +2339,7 @@
         <p:spPr>
           <a:xfrm>
             <a:off x="4946904" y="859536"/>
-            <a:ext cx="1410371" cy="50292"/>
+            <a:ext cx="1608704" cy="50292"/>
           </a:xfrm>
           <a:prstGeom prst="rect">
             <a:avLst/>
@@ -2385,7 +2385,7 @@
                   <a:srgbClr val="888888"/>
                 </a:solidFill>
               </a:rPr>
-              <a:t>Stories/NFTs: 64% · 7 de 11</a:t>
+              <a:t>Stories/NFTs: 73% · 8 de 11</a:t>
             </a:r>
             <a:endParaRPr lang="en-US" sz="650" dirty="0"/>
           </a:p>
@@ -2425,7 +2425,7 @@
         <p:spPr>
           <a:xfrm>
             <a:off x="4946904" y="1033272"/>
-            <a:ext cx="1873148" cy="50292"/>
+            <a:ext cx="1895185" cy="50292"/>
           </a:xfrm>
           <a:prstGeom prst="rect">
             <a:avLst/>
@@ -2471,7 +2471,7 @@
                   <a:srgbClr val="888888"/>
                 </a:solidFill>
               </a:rPr>
-              <a:t>Subs: 85% · 96 de 113</a:t>
+              <a:t>Subs: 86% · 97 de 113</a:t>
             </a:r>
             <a:endParaRPr lang="en-US" sz="650" dirty="0"/>
           </a:p>
@@ -2507,7 +2507,7 @@
                   <a:srgbClr val="DC2626"/>
                 </a:solidFill>
               </a:rPr>
-              <a:t>Projetado: 551.8h (+123.3h / +29%)</a:t>
+              <a:t>Projetado: 552.3h (+122.8h / +29%)</a:t>
             </a:r>
             <a:endParaRPr lang="en-US" sz="800" dirty="0"/>
           </a:p>
@@ -3634,7 +3634,7 @@
                   <a:srgbClr val="222222"/>
                 </a:solidFill>
               </a:rPr>
-              <a:t>1248h</a:t>
+              <a:t>1253h</a:t>
             </a:r>
             <a:endParaRPr lang="en-US" sz="2400" dirty="0"/>
           </a:p>
@@ -3767,7 +3767,7 @@
                   <a:srgbClr val="D97706"/>
                 </a:solidFill>
               </a:rPr>
-              <a:t>1243.9h</a:t>
+              <a:t>1255.4h</a:t>
             </a:r>
             <a:endParaRPr lang="en-US" sz="2400" dirty="0"/>
           </a:p>
@@ -4033,7 +4033,7 @@
                   <a:srgbClr val="D97706"/>
                 </a:solidFill>
               </a:rPr>
-              <a:t>+142.4h</a:t>
+              <a:t>+148.9h</a:t>
             </a:r>
             <a:endParaRPr lang="en-US" sz="2400" dirty="0"/>
           </a:p>
@@ -4069,7 +4069,7 @@
                   <a:srgbClr val="888888"/>
                 </a:solidFill>
               </a:rPr>
-              <a:t>projetado: 1390.4h (+11%)</a:t>
+              <a:t>projetado: 1401.9h (+12%)</a:t>
             </a:r>
             <a:endParaRPr lang="en-US" sz="700" dirty="0"/>
           </a:p>
@@ -4084,7 +4084,7 @@
         <p:spPr>
           <a:xfrm>
             <a:off x="2441448" y="2916936"/>
-            <a:ext cx="8630469" cy="54864"/>
+            <a:ext cx="8638807" cy="54864"/>
           </a:xfrm>
           <a:prstGeom prst="rect">
             <a:avLst/>
@@ -4108,8 +4108,8 @@
         </p:nvSpPr>
         <p:spPr>
           <a:xfrm>
-            <a:off x="11071917" y="2916936"/>
-            <a:ext cx="1016451" cy="54864"/>
+            <a:off x="11080255" y="2916936"/>
+            <a:ext cx="1008113" cy="54864"/>
           </a:xfrm>
           <a:prstGeom prst="rect">
             <a:avLst/>
@@ -4250,7 +4250,7 @@
                   <a:srgbClr val="0F6E56"/>
                 </a:solidFill>
               </a:rPr>
-              <a:t>90% concluido</a:t>
+              <a:t>91% concluido</a:t>
             </a:r>
             <a:endParaRPr lang="en-US" sz="650" dirty="0"/>
           </a:p>
@@ -4290,7 +4290,7 @@
         <p:spPr>
           <a:xfrm>
             <a:off x="2551176" y="3291840"/>
-            <a:ext cx="4102456" cy="64008"/>
+            <a:ext cx="4148038" cy="64008"/>
           </a:xfrm>
           <a:prstGeom prst="rect">
             <a:avLst/>
@@ -5167,7 +5167,7 @@
                   <a:srgbClr val="D85A30"/>
                 </a:solidFill>
               </a:rPr>
-              <a:t>17.3%</a:t>
+              <a:t>17.1%</a:t>
             </a:r>
             <a:endParaRPr lang="en-US" sz="2200" dirty="0"/>
           </a:p>
@@ -5300,7 +5300,7 @@
                   <a:srgbClr val="534AB7"/>
                 </a:solidFill>
               </a:rPr>
-              <a:t>11.5%</a:t>
+              <a:t>11.4%</a:t>
             </a:r>
             <a:endParaRPr lang="en-US" sz="2200" dirty="0"/>
           </a:p>
@@ -5566,7 +5566,7 @@
                   <a:srgbClr val="1D9E75"/>
                 </a:solidFill>
               </a:rPr>
-              <a:t>82.7%</a:t>
+              <a:t>82.9%</a:t>
             </a:r>
             <a:endParaRPr lang="en-US" sz="2200" dirty="0"/>
           </a:p>
@@ -6432,7 +6432,7 @@
                   <a:srgbClr val="FFFFFF"/>
                 </a:solidFill>
               </a:rPr>
-              <a:t>131</a:t>
+              <a:t>132</a:t>
             </a:r>
             <a:endParaRPr lang="en-US" sz="650" dirty="0"/>
           </a:p>
@@ -6482,7 +6482,7 @@
                   <a:srgbClr val="222222"/>
                 </a:solidFill>
               </a:rPr>
-              <a:t>131 itens criados pos 01/05</a:t>
+              <a:t>132 itens criados pos 01/05</a:t>
             </a:r>
             <a:endParaRPr lang="en-US" sz="750" dirty="0"/>
           </a:p>
@@ -6518,7 +6518,7 @@
                   <a:srgbClr val="222222"/>
                 </a:solidFill>
               </a:rPr>
-              <a:t>Princ +55h · Redund +165h · Obs +18h</a:t>
+              <a:t>Princ +55h · Redund +166h · Obs +18h</a:t>
             </a:r>
             <a:endParaRPr lang="en-US" sz="750" dirty="0"/>
           </a:p>
@@ -7752,7 +7752,7 @@
         <p:spPr>
           <a:xfrm>
             <a:off x="7360920" y="6153912"/>
-            <a:ext cx="705289" cy="73152"/>
+            <a:ext cx="731804" cy="73152"/>
           </a:xfrm>
           <a:prstGeom prst="rect">
             <a:avLst/>
@@ -7798,7 +7798,7 @@
                   <a:srgbClr val="1D9E75"/>
                 </a:solidFill>
               </a:rPr>
-              <a:t>212.8h · 52 subs finalizadas</a:t>
+              <a:t>220.8h · 54 subs finalizadas</a:t>
             </a:r>
             <a:endParaRPr lang="en-US" sz="950" dirty="0"/>
           </a:p>
@@ -8444,7 +8444,7 @@
         <p:spPr>
           <a:xfrm>
             <a:off x="11009376" y="6153912"/>
-            <a:ext cx="864572" cy="73152"/>
+            <a:ext cx="859408" cy="73152"/>
           </a:xfrm>
           <a:prstGeom prst="rect">
             <a:avLst/>
@@ -8490,7 +8490,7 @@
                   <a:srgbClr val="1D9E75"/>
                 </a:solidFill>
               </a:rPr>
-              <a:t>116.5h · 85 subs finalizadas</a:t>
+              <a:t>120h · 87 subs finalizadas</a:t>
             </a:r>
             <a:endParaRPr lang="en-US" sz="950" dirty="0"/>
           </a:p>
@@ -8526,7 +8526,7 @@
                   <a:srgbClr val="888888"/>
                 </a:solidFill>
               </a:rPr>
-              <a:t>138h estimadas</a:t>
+              <a:t>143h estimadas</a:t>
             </a:r>
             <a:endParaRPr lang="en-US" sz="850" dirty="0"/>
           </a:p>
